--- a/appunti/Presentazione_Eccezioni_Java.pptx
+++ b/appunti/Presentazione_Eccezioni_Java.pptx
@@ -3128,6 +3128,7 @@
               <a:defRPr sz="3000" b="1"/>
             </a:pPr>
             <a:r>
+              <a:rPr/>
               <a:t>Eccezioni in Java</a:t>
             </a:r>
           </a:p>
@@ -3159,6 +3160,7 @@
               <a:defRPr sz="1600"/>
             </a:pPr>
             <a:r>
+              <a:rPr/>
               <a:t>Gestire gli errori senza far crollare il programma</a:t>
             </a:r>
           </a:p>
@@ -3193,6 +3195,7 @@
               <a:defRPr sz="2000"/>
             </a:pPr>
             <a:r>
+              <a:rPr/>
               <a:t>Che cos'è un'eccezione e perché esiste</a:t>
             </a:r>
           </a:p>
@@ -3204,6 +3207,7 @@
               <a:defRPr sz="2000"/>
             </a:pPr>
             <a:r>
+              <a:rPr/>
               <a:t>try, catch e finally</a:t>
             </a:r>
           </a:p>
@@ -3215,6 +3219,7 @@
               <a:defRPr sz="2000"/>
             </a:pPr>
             <a:r>
+              <a:rPr/>
               <a:t>throw e throws</a:t>
             </a:r>
           </a:p>
@@ -3226,6 +3231,7 @@
               <a:defRPr sz="2000"/>
             </a:pPr>
             <a:r>
+              <a:rPr/>
               <a:t>Checked e unchecked exceptions</a:t>
             </a:r>
           </a:p>
@@ -3237,6 +3243,7 @@
               <a:defRPr sz="2000"/>
             </a:pPr>
             <a:r>
+              <a:rPr/>
               <a:t>Gerarchia di Throwable</a:t>
             </a:r>
           </a:p>
@@ -3248,6 +3255,7 @@
               <a:defRPr sz="2000"/>
             </a:pPr>
             <a:r>
+              <a:rPr/>
               <a:t>Eccezioni personalizzate</a:t>
             </a:r>
           </a:p>
@@ -3259,6 +3267,7 @@
               <a:defRPr sz="2000"/>
             </a:pPr>
             <a:r>
+              <a:rPr/>
               <a:t>Buone pratiche</a:t>
             </a:r>
           </a:p>
@@ -3308,6 +3317,7 @@
               <a:defRPr sz="3000" b="1"/>
             </a:pPr>
             <a:r>
+              <a:rPr/>
               <a:t>Un esempio concreto</a:t>
             </a:r>
           </a:p>
@@ -3360,34 +3370,42 @@
               </a:defRPr>
             </a:pPr>
             <a:r>
+              <a:rPr/>
               <a:t>try {</a:t>
             </a:r>
             <a:br/>
             <a:r>
+              <a:rPr/>
               <a:t>    int n = Integer.parseInt(scanner.nextLine());</a:t>
             </a:r>
             <a:br/>
             <a:r>
+              <a:rPr/>
               <a:t>    System.out.println(100 / n);</a:t>
             </a:r>
             <a:br/>
             <a:r>
+              <a:rPr/>
               <a:t>} catch (NumberFormatException e) {</a:t>
             </a:r>
             <a:br/>
             <a:r>
+              <a:rPr/>
               <a:t>    System.out.println("Devi inserire un numero.");</a:t>
             </a:r>
             <a:br/>
             <a:r>
+              <a:rPr/>
               <a:t>} catch (ArithmeticException e) {</a:t>
             </a:r>
             <a:br/>
             <a:r>
+              <a:rPr/>
               <a:t>    System.out.println("Non puoi dividere per zero.");</a:t>
             </a:r>
             <a:br/>
             <a:r>
+              <a:rPr/>
               <a:t>}</a:t>
             </a:r>
           </a:p>
@@ -3422,6 +3440,7 @@
               <a:defRPr sz="1500"/>
             </a:pPr>
             <a:r>
+              <a:rPr/>
               <a:t>Due possibili errori → due strategie di gestione diverse.</a:t>
             </a:r>
           </a:p>
@@ -3471,6 +3490,7 @@
               <a:defRPr sz="3000" b="1"/>
             </a:pPr>
             <a:r>
+              <a:rPr/>
               <a:t>Creare un'eccezione personalizzata</a:t>
             </a:r>
           </a:p>
@@ -3523,22 +3543,27 @@
               </a:defRPr>
             </a:pPr>
             <a:r>
+              <a:rPr/>
               <a:t>public class SaldoInsufficienteException extends Exception {</a:t>
             </a:r>
             <a:br/>
             <a:r>
+              <a:rPr/>
               <a:t>    public SaldoInsufficienteException(String message) {</a:t>
             </a:r>
             <a:br/>
             <a:r>
+              <a:rPr/>
               <a:t>        super(message);</a:t>
             </a:r>
             <a:br/>
             <a:r>
+              <a:rPr/>
               <a:t>    }</a:t>
             </a:r>
             <a:br/>
             <a:r>
+              <a:rPr/>
               <a:t>}</a:t>
             </a:r>
           </a:p>
@@ -3573,6 +3598,7 @@
               <a:defRPr sz="1600"/>
             </a:pPr>
             <a:r>
+              <a:rPr/>
               <a:t>Permette di rappresentare una condizione specifica del dominio.</a:t>
             </a:r>
           </a:p>
@@ -3584,6 +3610,7 @@
               <a:defRPr sz="1600"/>
             </a:pPr>
             <a:r>
+              <a:rPr/>
               <a:t>Estendere Exception per una checked exception oppure RuntimeException per una unchecked.</a:t>
             </a:r>
           </a:p>
@@ -3633,6 +3660,7 @@
               <a:defRPr sz="3000" b="1"/>
             </a:pPr>
             <a:r>
+              <a:rPr/>
               <a:t>Eccezioni e progettazione</a:t>
             </a:r>
           </a:p>
@@ -3667,6 +3695,7 @@
               <a:defRPr sz="1900"/>
             </a:pPr>
             <a:r>
+              <a:rPr/>
               <a:t>Non usare le eccezioni per controllare il normale flusso del programma.</a:t>
             </a:r>
           </a:p>
@@ -3678,6 +3707,7 @@
               <a:defRPr sz="1900"/>
             </a:pPr>
             <a:r>
+              <a:rPr/>
               <a:t>Validare gli input quando possibile.</a:t>
             </a:r>
           </a:p>
@@ -3689,6 +3719,7 @@
               <a:defRPr sz="1900"/>
             </a:pPr>
             <a:r>
+              <a:rPr/>
               <a:t>Catturare l'eccezione nel punto in cui è possibile gestirla davvero.</a:t>
             </a:r>
           </a:p>
@@ -3700,6 +3731,7 @@
               <a:defRPr sz="1900"/>
             </a:pPr>
             <a:r>
+              <a:rPr/>
               <a:t>Non usare catch vuoti.</a:t>
             </a:r>
           </a:p>
@@ -3711,6 +3743,7 @@
               <a:defRPr sz="1900"/>
             </a:pPr>
             <a:r>
+              <a:rPr/>
               <a:t>Non catturare Exception indiscriminatamente senza una ragione.</a:t>
             </a:r>
           </a:p>
@@ -3722,6 +3755,7 @@
               <a:defRPr sz="1900"/>
             </a:pPr>
             <a:r>
+              <a:rPr/>
               <a:t>Fornire messaggi utili e mantenere il contesto dell'errore.</a:t>
             </a:r>
           </a:p>
@@ -3771,6 +3805,7 @@
               <a:defRPr sz="3000" b="1"/>
             </a:pPr>
             <a:r>
+              <a:rPr/>
               <a:t>Try-with-resources</a:t>
             </a:r>
           </a:p>
@@ -3823,26 +3858,32 @@
               </a:defRPr>
             </a:pPr>
             <a:r>
+              <a:rPr/>
               <a:t>try (BufferedReader br =</a:t>
             </a:r>
             <a:br/>
             <a:r>
+              <a:rPr/>
               <a:t>        new BufferedReader(new FileReader("dati.txt"))) {</a:t>
             </a:r>
             <a:br/>
             <a:r>
+              <a:rPr/>
               <a:t>    String riga = br.readLine();</a:t>
             </a:r>
             <a:br/>
             <a:r>
+              <a:rPr/>
               <a:t>} catch (IOException e) {</a:t>
             </a:r>
             <a:br/>
             <a:r>
+              <a:rPr/>
               <a:t>    System.out.println("Errore nella lettura del file.");</a:t>
             </a:r>
             <a:br/>
             <a:r>
+              <a:rPr/>
               <a:t>}</a:t>
             </a:r>
           </a:p>
@@ -3877,6 +3918,7 @@
               <a:defRPr sz="1600"/>
             </a:pPr>
             <a:r>
+              <a:rPr/>
               <a:t>Le risorse AutoCloseable vengono chiuse automaticamente.</a:t>
             </a:r>
           </a:p>
@@ -3888,6 +3930,7 @@
               <a:defRPr sz="1600"/>
             </a:pPr>
             <a:r>
+              <a:rPr/>
               <a:t>È spesso preferibile al classico try/finally per file e risorse simili.</a:t>
             </a:r>
           </a:p>
@@ -3937,6 +3980,7 @@
               <a:defRPr sz="3000" b="1"/>
             </a:pPr>
             <a:r>
+              <a:rPr/>
               <a:t>In sintesi</a:t>
             </a:r>
           </a:p>
@@ -3971,6 +4015,7 @@
               <a:defRPr sz="2000"/>
             </a:pPr>
             <a:r>
+              <a:rPr/>
               <a:t>try → individua il codice che può fallire</a:t>
             </a:r>
           </a:p>
@@ -3982,6 +4027,7 @@
               <a:defRPr sz="2000"/>
             </a:pPr>
             <a:r>
+              <a:rPr/>
               <a:t>catch → gestisce una specifica eccezione</a:t>
             </a:r>
           </a:p>
@@ -3993,6 +4039,7 @@
               <a:defRPr sz="2000"/>
             </a:pPr>
             <a:r>
+              <a:rPr/>
               <a:t>finally → esegue operazioni finali</a:t>
             </a:r>
           </a:p>
@@ -4004,6 +4051,7 @@
               <a:defRPr sz="2000"/>
             </a:pPr>
             <a:r>
+              <a:rPr/>
               <a:t>throw → lancia un'eccezione</a:t>
             </a:r>
           </a:p>
@@ -4015,6 +4063,7 @@
               <a:defRPr sz="2000"/>
             </a:pPr>
             <a:r>
+              <a:rPr/>
               <a:t>throws → dichiara un'eccezione</a:t>
             </a:r>
           </a:p>
@@ -4026,6 +4075,7 @@
               <a:defRPr sz="2000"/>
             </a:pPr>
             <a:r>
+              <a:rPr/>
               <a:t>Eccezioni personalizzate → rappresentano condizioni specifiche</a:t>
             </a:r>
           </a:p>
@@ -4037,6 +4087,7 @@
               <a:defRPr sz="2000"/>
             </a:pPr>
             <a:r>
+              <a:rPr/>
               <a:t>Una buona gestione rende il software più robusto e comprensibile</a:t>
             </a:r>
           </a:p>
@@ -4086,6 +4137,7 @@
               <a:defRPr sz="3000" b="1"/>
             </a:pPr>
             <a:r>
+              <a:rPr/>
               <a:t>Esercizio</a:t>
             </a:r>
           </a:p>
@@ -4117,6 +4169,7 @@
               <a:defRPr sz="1600"/>
             </a:pPr>
             <a:r>
+              <a:rPr/>
               <a:t>Mettiamo in pratica le eccezioni</a:t>
             </a:r>
           </a:p>
@@ -4151,6 +4204,7 @@
               <a:defRPr sz="2000"/>
             </a:pPr>
             <a:r>
+              <a:rPr/>
               <a:t>Realizzare un programma che chieda una serie di numeri.</a:t>
             </a:r>
           </a:p>
@@ -4162,6 +4216,7 @@
               <a:defRPr sz="2000"/>
             </a:pPr>
             <a:r>
+              <a:rPr/>
               <a:t>Gestire gli inserimenti non numerici.</a:t>
             </a:r>
           </a:p>
@@ -4173,6 +4228,7 @@
               <a:defRPr sz="2000"/>
             </a:pPr>
             <a:r>
+              <a:rPr/>
               <a:t>Gestire la divisione per zero.</a:t>
             </a:r>
           </a:p>
@@ -4184,6 +4240,7 @@
               <a:defRPr sz="2000"/>
             </a:pPr>
             <a:r>
+              <a:rPr/>
               <a:t>Creare almeno un'eccezione personalizzata.</a:t>
             </a:r>
           </a:p>
@@ -4195,6 +4252,7 @@
               <a:defRPr sz="2000"/>
             </a:pPr>
             <a:r>
+              <a:rPr/>
               <a:t>Utilizzare try/catch e, dove opportuno, throw e throws.</a:t>
             </a:r>
           </a:p>
@@ -4206,6 +4264,7 @@
               <a:defRPr sz="2000"/>
             </a:pPr>
             <a:r>
+              <a:rPr/>
               <a:t>Il programma non deve terminare in modo anomalo a causa di un input errato.</a:t>
             </a:r>
           </a:p>
@@ -4255,6 +4314,7 @@
               <a:defRPr sz="3000" b="1"/>
             </a:pPr>
             <a:r>
+              <a:rPr/>
               <a:t>Che cos'è un'eccezione?</a:t>
             </a:r>
           </a:p>
@@ -4289,6 +4349,7 @@
               <a:defRPr sz="2000"/>
             </a:pPr>
             <a:r>
+              <a:rPr/>
               <a:t>È un evento anomalo che interrompe il normale flusso di esecuzione.</a:t>
             </a:r>
           </a:p>
@@ -4300,6 +4361,7 @@
               <a:defRPr sz="2000"/>
             </a:pPr>
             <a:r>
+              <a:rPr/>
               <a:t>Java crea un oggetto eccezione e lo propaga finché un codice decide come gestirlo.</a:t>
             </a:r>
           </a:p>
@@ -4311,6 +4373,7 @@
               <a:defRPr sz="2000"/>
             </a:pPr>
             <a:r>
+              <a:rPr/>
               <a:t>Esempi: divisione per zero, indice non valido, file inesistente, conversione numerica errata.</a:t>
             </a:r>
           </a:p>
@@ -4322,6 +4385,7 @@
               <a:defRPr sz="2000"/>
             </a:pPr>
             <a:r>
+              <a:rPr/>
               <a:t>Gestire un'eccezione significa decidere come reagire all'errore.</a:t>
             </a:r>
           </a:p>
@@ -4371,6 +4435,7 @@
               <a:defRPr sz="3000" b="1"/>
             </a:pPr>
             <a:r>
+              <a:rPr/>
               <a:t>La gerarchia delle eccezioni</a:t>
             </a:r>
           </a:p>
@@ -4405,6 +4470,7 @@
               <a:defRPr sz="2000"/>
             </a:pPr>
             <a:r>
+              <a:rPr/>
               <a:t>Throwable è la radice della gerarchia.</a:t>
             </a:r>
           </a:p>
@@ -4416,6 +4482,7 @@
               <a:defRPr sz="2000"/>
             </a:pPr>
             <a:r>
+              <a:rPr/>
               <a:t>Error: problemi gravi, normalmente non gestiti dall'applicazione.</a:t>
             </a:r>
           </a:p>
@@ -4427,6 +4494,7 @@
               <a:defRPr sz="2000"/>
             </a:pPr>
             <a:r>
+              <a:rPr/>
               <a:t>Exception: condizioni che un'applicazione può gestire.</a:t>
             </a:r>
           </a:p>
@@ -4438,6 +4506,7 @@
               <a:defRPr sz="2000"/>
             </a:pPr>
             <a:r>
+              <a:rPr/>
               <a:t>RuntimeException: eccezioni non controllate (unchecked).</a:t>
             </a:r>
           </a:p>
@@ -4449,6 +4518,7 @@
               <a:defRPr sz="2000"/>
             </a:pPr>
             <a:r>
+              <a:rPr/>
               <a:t>Le checked exception derivano da Exception ma non da RuntimeException.</a:t>
             </a:r>
           </a:p>
@@ -4498,6 +4568,7 @@
               <a:defRPr sz="3000" b="1"/>
             </a:pPr>
             <a:r>
+              <a:rPr/>
               <a:t>Checked e unchecked</a:t>
             </a:r>
           </a:p>
@@ -4532,6 +4603,7 @@
               <a:defRPr sz="2000"/>
             </a:pPr>
             <a:r>
+              <a:rPr/>
               <a:t>Checked: il compilatore obbliga a gestirle o dichiararle con throws.</a:t>
             </a:r>
           </a:p>
@@ -4543,6 +4615,7 @@
               <a:defRPr sz="2000"/>
             </a:pPr>
             <a:r>
+              <a:rPr/>
               <a:t>Esempio: IOException.</a:t>
             </a:r>
           </a:p>
@@ -4554,6 +4627,7 @@
               <a:defRPr sz="2000"/>
             </a:pPr>
             <a:r>
+              <a:rPr/>
               <a:t>Unchecked: non è obbligatorio catturarle o dichiararle.</a:t>
             </a:r>
           </a:p>
@@ -4565,6 +4639,7 @@
               <a:defRPr sz="2000"/>
             </a:pPr>
             <a:r>
+              <a:rPr/>
               <a:t>Esempi: NullPointerException, ArithmeticException, NumberFormatException.</a:t>
             </a:r>
           </a:p>
@@ -4576,6 +4651,7 @@
               <a:defRPr sz="2000"/>
             </a:pPr>
             <a:r>
+              <a:rPr/>
               <a:t>La distinzione riguarda il controllo del compilatore, non la gravità.</a:t>
             </a:r>
           </a:p>
@@ -4625,6 +4701,7 @@
               <a:defRPr sz="3000" b="1"/>
             </a:pPr>
             <a:r>
+              <a:rPr/>
               <a:t>try e catch</a:t>
             </a:r>
           </a:p>
@@ -4656,6 +4733,7 @@
               <a:defRPr sz="1600"/>
             </a:pPr>
             <a:r>
+              <a:rPr/>
               <a:t>Proteggere il codice che può generare un'eccezione</a:t>
             </a:r>
           </a:p>
@@ -4708,22 +4786,27 @@
               </a:defRPr>
             </a:pPr>
             <a:r>
+              <a:rPr/>
               <a:t>try {</a:t>
             </a:r>
             <a:br/>
             <a:r>
+              <a:rPr/>
               <a:t>    int n = Integer.parseInt("abc");</a:t>
             </a:r>
             <a:br/>
             <a:r>
+              <a:rPr/>
               <a:t>} catch (NumberFormatException e) {</a:t>
             </a:r>
             <a:br/>
             <a:r>
+              <a:rPr/>
               <a:t>    System.out.println("Numero non valido");</a:t>
             </a:r>
             <a:br/>
             <a:r>
+              <a:rPr/>
               <a:t>}</a:t>
             </a:r>
           </a:p>
@@ -4758,6 +4841,7 @@
               <a:defRPr sz="1700"/>
             </a:pPr>
             <a:r>
+              <a:rPr/>
               <a:t>try contiene il codice potenzialmente problematico.</a:t>
             </a:r>
           </a:p>
@@ -4769,6 +4853,7 @@
               <a:defRPr sz="1700"/>
             </a:pPr>
             <a:r>
+              <a:rPr/>
               <a:t>catch specifica il tipo di eccezione da gestire.</a:t>
             </a:r>
           </a:p>
@@ -4780,6 +4865,7 @@
               <a:defRPr sz="1700"/>
             </a:pPr>
             <a:r>
+              <a:rPr/>
               <a:t>L'oggetto e contiene informazioni sull'eccezione.</a:t>
             </a:r>
           </a:p>
@@ -4829,6 +4915,7 @@
               <a:defRPr sz="3000" b="1"/>
             </a:pPr>
             <a:r>
+              <a:rPr/>
               <a:t>Più catch</a:t>
             </a:r>
           </a:p>
@@ -4881,30 +4968,37 @@
               </a:defRPr>
             </a:pPr>
             <a:r>
+              <a:rPr/>
               <a:t>try {</a:t>
             </a:r>
             <a:br/>
             <a:r>
+              <a:rPr/>
               <a:t>    // operazioni</a:t>
             </a:r>
             <a:br/>
             <a:r>
+              <a:rPr/>
               <a:t>} catch (NumberFormatException e) {</a:t>
             </a:r>
             <a:br/>
             <a:r>
+              <a:rPr/>
               <a:t>    // formato non valido</a:t>
             </a:r>
             <a:br/>
             <a:r>
+              <a:rPr/>
               <a:t>} catch (ArithmeticException e) {</a:t>
             </a:r>
             <a:br/>
             <a:r>
+              <a:rPr/>
               <a:t>    // operazione matematica non valida</a:t>
             </a:r>
             <a:br/>
             <a:r>
+              <a:rPr/>
               <a:t>}</a:t>
             </a:r>
           </a:p>
@@ -4939,6 +5033,7 @@
               <a:defRPr sz="1700"/>
             </a:pPr>
             <a:r>
+              <a:rPr/>
               <a:t>Gestire tipi diversi con catch distinti.</a:t>
             </a:r>
           </a:p>
@@ -4950,6 +5045,7 @@
               <a:defRPr sz="1700"/>
             </a:pPr>
             <a:r>
+              <a:rPr/>
               <a:t>Dal tipo più specifico al più generale.</a:t>
             </a:r>
           </a:p>
@@ -4961,6 +5057,7 @@
               <a:defRPr sz="1700"/>
             </a:pPr>
             <a:r>
+              <a:rPr/>
               <a:t>Un catch (Exception e) troppo generico può nascondere problemi.</a:t>
             </a:r>
           </a:p>
@@ -5010,6 +5107,7 @@
               <a:defRPr sz="3000" b="1"/>
             </a:pPr>
             <a:r>
+              <a:rPr/>
               <a:t>finally</a:t>
             </a:r>
           </a:p>
@@ -5041,6 +5139,7 @@
               <a:defRPr sz="1600"/>
             </a:pPr>
             <a:r>
+              <a:rPr/>
               <a:t>Codice da eseguire comunque</a:t>
             </a:r>
           </a:p>
@@ -5093,30 +5192,37 @@
               </a:defRPr>
             </a:pPr>
             <a:r>
+              <a:rPr/>
               <a:t>try {</a:t>
             </a:r>
             <a:br/>
             <a:r>
+              <a:rPr/>
               <a:t>    // operazione</a:t>
             </a:r>
             <a:br/>
             <a:r>
+              <a:rPr/>
               <a:t>} catch (Exception e) {</a:t>
             </a:r>
             <a:br/>
             <a:r>
+              <a:rPr/>
               <a:t>    // gestione</a:t>
             </a:r>
             <a:br/>
             <a:r>
+              <a:rPr/>
               <a:t>} finally {</a:t>
             </a:r>
             <a:br/>
             <a:r>
+              <a:rPr/>
               <a:t>    // eseguito comunque</a:t>
             </a:r>
             <a:br/>
             <a:r>
+              <a:rPr/>
               <a:t>}</a:t>
             </a:r>
           </a:p>
@@ -5151,6 +5257,7 @@
               <a:defRPr sz="1700"/>
             </a:pPr>
             <a:r>
+              <a:rPr/>
               <a:t>Utile per operazioni di pulizia e rilascio di risorse.</a:t>
             </a:r>
           </a:p>
@@ -5162,6 +5269,7 @@
               <a:defRPr sz="1700"/>
             </a:pPr>
             <a:r>
+              <a:rPr/>
               <a:t>Per molte risorse moderne è preferibile try-with-resources.</a:t>
             </a:r>
           </a:p>
@@ -5211,6 +5319,7 @@
               <a:defRPr sz="3000" b="1"/>
             </a:pPr>
             <a:r>
+              <a:rPr/>
               <a:t>throw e throws</a:t>
             </a:r>
           </a:p>
@@ -5263,26 +5372,32 @@
               </a:defRPr>
             </a:pPr>
             <a:r>
+              <a:rPr/>
               <a:t>void preleva(double importo) throws SaldoInsufficienteException {</a:t>
             </a:r>
             <a:br/>
             <a:r>
+              <a:rPr/>
               <a:t>    if (importo &gt; saldo) {</a:t>
             </a:r>
             <a:br/>
             <a:r>
+              <a:rPr/>
               <a:t>        throw new SaldoInsufficienteException("Saldo insufficiente");</a:t>
             </a:r>
             <a:br/>
             <a:r>
+              <a:rPr/>
               <a:t>    }</a:t>
             </a:r>
             <a:br/>
             <a:r>
+              <a:rPr/>
               <a:t>    saldo -= importo;</a:t>
             </a:r>
             <a:br/>
             <a:r>
+              <a:rPr/>
               <a:t>}</a:t>
             </a:r>
           </a:p>
@@ -5317,6 +5432,7 @@
               <a:defRPr sz="1600"/>
             </a:pPr>
             <a:r>
+              <a:rPr/>
               <a:t>throw = lancia esplicitamente un'eccezione.</a:t>
             </a:r>
           </a:p>
@@ -5328,6 +5444,7 @@
               <a:defRPr sz="1600"/>
             </a:pPr>
             <a:r>
+              <a:rPr/>
               <a:t>throws = dichiara nella firma che un metodo può propagarla.</a:t>
             </a:r>
           </a:p>
@@ -5377,6 +5494,7 @@
               <a:defRPr sz="3000" b="1"/>
             </a:pPr>
             <a:r>
+              <a:rPr/>
               <a:t>Eccezioni comuni di java.lang</a:t>
             </a:r>
           </a:p>
@@ -5411,6 +5529,7 @@
               <a:defRPr sz="1800"/>
             </a:pPr>
             <a:r>
+              <a:rPr/>
               <a:t>ArithmeticException — operazione aritmetica non valida.</a:t>
             </a:r>
           </a:p>
@@ -5422,6 +5541,7 @@
               <a:defRPr sz="1800"/>
             </a:pPr>
             <a:r>
+              <a:rPr/>
               <a:t>ArrayIndexOutOfBoundsException — indice non valido in un array.</a:t>
             </a:r>
           </a:p>
@@ -5433,6 +5553,7 @@
               <a:defRPr sz="1800"/>
             </a:pPr>
             <a:r>
+              <a:rPr/>
               <a:t>NullPointerException — accesso a un riferimento null.</a:t>
             </a:r>
           </a:p>
@@ -5444,6 +5565,7 @@
               <a:defRPr sz="1800"/>
             </a:pPr>
             <a:r>
+              <a:rPr/>
               <a:t>NumberFormatException — conversione numerica non valida.</a:t>
             </a:r>
           </a:p>
@@ -5455,6 +5577,7 @@
               <a:defRPr sz="1800"/>
             </a:pPr>
             <a:r>
+              <a:rPr/>
               <a:t>IllegalArgumentException — argomento non valido.</a:t>
             </a:r>
           </a:p>
@@ -5466,6 +5589,7 @@
               <a:defRPr sz="1800"/>
             </a:pPr>
             <a:r>
+              <a:rPr/>
               <a:t>IllegalStateException — oggetto in uno stato incompatibile.</a:t>
             </a:r>
           </a:p>
@@ -5477,6 +5601,7 @@
               <a:defRPr sz="1800"/>
             </a:pPr>
             <a:r>
+              <a:rPr/>
               <a:t>IndexOutOfBoundsException — indice fuori dai limiti.</a:t>
             </a:r>
           </a:p>
